--- a/dataset/guides_final/common/IT-AI-001_접근권한 AI 응대·담당자 인계 기준.pptx
+++ b/dataset/guides_final/common/IT-AI-001_접근권한 AI 응대·담당자 인계 기준.pptx
@@ -5991,7 +5991,7 @@
                           <a:ea typeface="Malgun Gothic"/>
                           <a:cs typeface="Malgun Gothic"/>
                         </a:rPr>
-                        <a:t>RDY → IP → FIN → CLS. FIN은 담당자 처리 완료이고, 문의자가 해결을 확인해야 CLS로 바꾼다.</a:t>
+                        <a:t>RDY → WIP → FIN → CLS. FIN은 담당자 처리 완료이고, 문의자가 해결을 확인해야 CLS로 바꾼다.</a:t>
                       </a:r>
                     </a:p>
                   </a:txBody>

--- a/dataset/guides_final/common/IT-AI-001_접근권한 AI 응대·담당자 인계 기준.pptx
+++ b/dataset/guides_final/common/IT-AI-001_접근권한 AI 응대·담당자 인계 기준.pptx
@@ -3229,7 +3229,7 @@
                 <a:ea typeface="Malgun Gothic"/>
                 <a:cs typeface="Malgun Gothic"/>
               </a:rPr>
-              <a:t>한화시스템 ICT ITssue 운영 정책 · AI 응대 정책</a:t>
+              <a:t>가상 ICT 기업 ITssue 운영 정책 · AI 응대 정책</a:t>
             </a:r>
           </a:p>
         </p:txBody>
@@ -3508,7 +3508,7 @@
                 <a:ea typeface="Malgun Gothic"/>
                 <a:cs typeface="Malgun Gothic"/>
               </a:rPr>
-              <a:t>© HANWHA SYSTEMS ICT · IT-AI-001 · 사내 제한</a:t>
+              <a:t>© 가상 ICT 기업 · IT-AI-001 · 사내 제한</a:t>
             </a:r>
           </a:p>
         </p:txBody>
@@ -4792,7 +4792,7 @@
                 <a:ea typeface="Malgun Gothic"/>
                 <a:cs typeface="Malgun Gothic"/>
               </a:rPr>
-              <a:t>© HANWHA SYSTEMS ICT · IT-AI-001 · 사내 제한</a:t>
+              <a:t>© 가상 ICT 기업 · IT-AI-001 · 사내 제한</a:t>
             </a:r>
           </a:p>
         </p:txBody>
@@ -5040,7 +5040,7 @@
                 <a:ea typeface="Malgun Gothic"/>
                 <a:cs typeface="Malgun Gothic"/>
               </a:rPr>
-              <a:t>© HANWHA SYSTEMS ICT · IT-AI-001 · 사내 제한</a:t>
+              <a:t>© 가상 ICT 기업 · IT-AI-001 · 사내 제한</a:t>
             </a:r>
           </a:p>
         </p:txBody>
@@ -6790,7 +6790,7 @@
                 <a:ea typeface="Malgun Gothic"/>
                 <a:cs typeface="Malgun Gothic"/>
               </a:rPr>
-              <a:t>© HANWHA SYSTEMS ICT · IT-AI-001 · 사내 제한</a:t>
+              <a:t>© 가상 ICT 기업 · IT-AI-001 · 사내 제한</a:t>
             </a:r>
           </a:p>
         </p:txBody>
@@ -7818,7 +7818,7 @@
                 <a:ea typeface="Malgun Gothic"/>
                 <a:cs typeface="Malgun Gothic"/>
               </a:rPr>
-              <a:t>© HANWHA SYSTEMS ICT · IT-AI-001 · 사내 제한</a:t>
+              <a:t>© 가상 ICT 기업 · IT-AI-001 · 사내 제한</a:t>
             </a:r>
           </a:p>
         </p:txBody>
@@ -8066,7 +8066,7 @@
                 <a:ea typeface="Malgun Gothic"/>
                 <a:cs typeface="Malgun Gothic"/>
               </a:rPr>
-              <a:t>© HANWHA SYSTEMS ICT · IT-AI-001 · 사내 제한</a:t>
+              <a:t>© 가상 ICT 기업 · IT-AI-001 · 사내 제한</a:t>
             </a:r>
           </a:p>
         </p:txBody>
@@ -9839,7 +9839,7 @@
                 <a:ea typeface="Malgun Gothic"/>
                 <a:cs typeface="Malgun Gothic"/>
               </a:rPr>
-              <a:t>© HANWHA SYSTEMS ICT · IT-AI-001 · 사내 제한</a:t>
+              <a:t>© 가상 ICT 기업 · IT-AI-001 · 사내 제한</a:t>
             </a:r>
           </a:p>
         </p:txBody>
@@ -10769,7 +10769,7 @@
                 <a:ea typeface="Malgun Gothic"/>
                 <a:cs typeface="Malgun Gothic"/>
               </a:rPr>
-              <a:t>© HANWHA SYSTEMS ICT · IT-AI-001 · 사내 제한</a:t>
+              <a:t>© 가상 ICT 기업 · IT-AI-001 · 사내 제한</a:t>
             </a:r>
           </a:p>
         </p:txBody>
@@ -12412,7 +12412,7 @@
                 <a:ea typeface="Malgun Gothic"/>
                 <a:cs typeface="Malgun Gothic"/>
               </a:rPr>
-              <a:t>© HANWHA SYSTEMS ICT · IT-AI-001 · 사내 제한</a:t>
+              <a:t>© 가상 ICT 기업 · IT-AI-001 · 사내 제한</a:t>
             </a:r>
           </a:p>
         </p:txBody>
@@ -13428,7 +13428,7 @@
                 <a:ea typeface="Malgun Gothic"/>
                 <a:cs typeface="Malgun Gothic"/>
               </a:rPr>
-              <a:t>© HANWHA SYSTEMS ICT · IT-AI-001 · 사내 제한</a:t>
+              <a:t>© 가상 ICT 기업 · IT-AI-001 · 사내 제한</a:t>
             </a:r>
           </a:p>
         </p:txBody>
@@ -13676,7 +13676,7 @@
                 <a:ea typeface="Malgun Gothic"/>
                 <a:cs typeface="Malgun Gothic"/>
               </a:rPr>
-              <a:t>© HANWHA SYSTEMS ICT · IT-AI-001 · 사내 제한</a:t>
+              <a:t>© 가상 ICT 기업 · IT-AI-001 · 사내 제한</a:t>
             </a:r>
           </a:p>
         </p:txBody>
@@ -14884,7 +14884,7 @@
                 <a:ea typeface="Malgun Gothic"/>
                 <a:cs typeface="Malgun Gothic"/>
               </a:rPr>
-              <a:t>© HANWHA SYSTEMS ICT · IT-AI-001 · 사내 제한</a:t>
+              <a:t>© 가상 ICT 기업 · IT-AI-001 · 사내 제한</a:t>
             </a:r>
           </a:p>
         </p:txBody>
@@ -15132,7 +15132,7 @@
                 <a:ea typeface="Malgun Gothic"/>
                 <a:cs typeface="Malgun Gothic"/>
               </a:rPr>
-              <a:t>© HANWHA SYSTEMS ICT · IT-AI-001 · 사내 제한</a:t>
+              <a:t>© 가상 ICT 기업 · IT-AI-001 · 사내 제한</a:t>
             </a:r>
           </a:p>
         </p:txBody>
@@ -16437,7 +16437,7 @@
                 <a:ea typeface="Malgun Gothic"/>
                 <a:cs typeface="Malgun Gothic"/>
               </a:rPr>
-              <a:t>© HANWHA SYSTEMS ICT · IT-AI-001 · 사내 제한</a:t>
+              <a:t>© 가상 ICT 기업 · IT-AI-001 · 사내 제한</a:t>
             </a:r>
           </a:p>
         </p:txBody>
@@ -17689,7 +17689,7 @@
                 <a:ea typeface="Malgun Gothic"/>
                 <a:cs typeface="Malgun Gothic"/>
               </a:rPr>
-              <a:t>© HANWHA SYSTEMS ICT · IT-AI-001 · 사내 제한</a:t>
+              <a:t>© 가상 ICT 기업 · IT-AI-001 · 사내 제한</a:t>
             </a:r>
           </a:p>
         </p:txBody>
@@ -17937,7 +17937,7 @@
                 <a:ea typeface="Malgun Gothic"/>
                 <a:cs typeface="Malgun Gothic"/>
               </a:rPr>
-              <a:t>© HANWHA SYSTEMS ICT · IT-AI-001 · 사내 제한</a:t>
+              <a:t>© 가상 ICT 기업 · IT-AI-001 · 사내 제한</a:t>
             </a:r>
           </a:p>
         </p:txBody>
